--- a/CostVision-Workflow-Explained.pptx
+++ b/CostVision-Workflow-Explained.pptx
@@ -3766,7 +3766,7 @@
           <a:p>
             <a:r>
               <a:rPr lang="en-US" dirty="0"/>
-              <a:t>I was asked what the geometry kernel actually is, so let me answer that properly, including the commercial question underneath it. A geometry kernel is the mathematical engine that understands solid shapes. It is the same class of software that sits underneath CATIA, SolidWorks and NX — when you drag a face in CAD, a kernel is doing the maths. Ours is Open CASCADE, usually called OCCT, and we drive it from Python using a library called CadQuery. The important distinction is that it reads the real geometry, not a picture of it. A STEP file describes a cylinder as a genuine mathematical cylinder with a radius and an axis. A mesh file only has triangles that look round. That is why we can say "this is a twelve millimetre bore, forty millimetres deep, and it goes all the way through" with certainty rather than approximation. Is it open source? Yes, and I want to be transparent about the licences because someone will ask. Open CASCADE is LGPL version two point one with a linking exception, which is what lets us use it in a commercial tool. CadQuery and its bindings are Apache two point zero. The three-D viewer you see on screen is three.js, which is MIT. All permissive, all long-established, all free. Practically that means three things. There is no per-seat CAD licence to buy for the costing tool. There is no vendor who can change the terms on us. And — this is the one that matters for us — no third party ever sees the model, because the kernel runs as a process on our own server. The CAD file is measured exactly where it sits. How does it actually measure? Four things. It integrates the solid to get an exact volume, then publishes a weight for every candidate density and waits for something to name the material. It walks every cylindrical face to build the hole table — diameter from the exact radius, depth from the surface parameter span, and through-versus-blind by comparing that depth to the bounding box. It ray-casts inside the solid to find true wall thickness, which is the measurement that distinguishes a casting from a machined block. And it classifies every face by surface type, so the flats we will have to mill are counted rather than guessed. And the honest limitation, which I would rather you hear from me. The kernel is exact about what is in the model and completely silent about what is not. It cannot read a tolerance, a surface finish or a material callout unless the CAD file actually carries it. Those still come off the drawing or from our engineer. It measures. It does not interpret.</a:t>
+              <a:t>I was asked what the geometry kernel actually is, so let me answer that properly, including the commercial question underneath it. A geometry kernel is the mathematical engine that understands solid shapes. It is the same class of software that sits underneath CATIA, SolidWorks and NX — when you drag a face in CAD, a kernel is doing the maths. Ours is Open CASCADE, usually called OCCT, and we drive it from Python through its official bindings, called OCP. Worth being precise: the measurement code calls OCP directly, so there is one fewer library sitting between your CAD file and the number. The important distinction is that it reads the real geometry, not a picture of it. A STEP file describes a cylinder as a genuine mathematical cylinder with a radius and an axis. A mesh file only has triangles that look round. That is why we can say "this is a twelve millimetre bore, forty millimetres deep, and it goes all the way through" with certainty rather than approximation. Is it open source? Yes, and I want to be transparent about the licences because someone will ask. Open CASCADE is LGPL version two point one with a linking exception, which is what lets us use it in a commercial tool. The OCP bindings are Apache two point zero. The three-D viewer you see on screen is three.js, which is MIT. All permissive, all long-established, all free. Practically that means three things. There is no per-seat CAD licence to buy for the costing tool. There is no vendor who can change the terms on us. And — this is the one that matters for us — no third party ever sees the model, because the kernel runs as a process on our own server. The CAD file is measured exactly where it sits. How does it actually measure? Four things. It integrates the solid to get an exact volume, then publishes a weight for every candidate density and waits for something to name the material. It walks every cylindrical face to build the hole table — diameter from the exact radius, depth from the surface parameter span, and through-versus-blind by comparing that depth to the bounding box. It ray-casts inside the solid to find true wall thickness, which is the measurement that distinguishes a casting from a machined block. And it classifies every face by surface type, so the flats we will have to mill are counted rather than guessed. And the honest limitation, which I would rather you hear from me. The kernel is exact about what is in the model and completely silent about what is not. It cannot read a tolerance, a surface finish or a material callout unless the CAD file actually carries it. Those still come off the drawing or from our engineer. It measures. It does not interpret.</a:t>
             </a:r>
             <a:endParaRPr lang="en-US" dirty="0"/>
           </a:p>
@@ -41464,7 +41464,7 @@
                 <a:ea typeface="Calibri" pitchFamily="34" charset="-122"/>
                 <a:cs typeface="Calibri" pitchFamily="34" charset="-120"/>
               </a:rPr>
-              <a:t>OCCT / CadQuery. Volume, walls, holes and faces — measured, never guessed.</a:t>
+              <a:t>OCCT via the OCP bindings. Volume, walls, holes and faces — measured, never guessed.</a:t>
             </a:r>
             <a:endParaRPr lang="en-US" sz="840" dirty="0"/>
           </a:p>
@@ -51287,7 +51287,7 @@
                 <a:ea typeface="Calibri" pitchFamily="34" charset="-122"/>
                 <a:cs typeface="Calibri" pitchFamily="34" charset="-120"/>
               </a:rPr>
-              <a:t>CostVision uses Open CASCADE (OCCT), driven from Python through CadQuery.</a:t>
+              <a:t>CostVision uses Open CASCADE (OCCT), driven from Python through the OCP bindings.</a:t>
             </a:r>
             <a:endParaRPr lang="en-US" sz="1100" dirty="0"/>
           </a:p>
@@ -51548,7 +51548,7 @@
                 <a:ea typeface="Calibri" pitchFamily="34" charset="-122"/>
                 <a:cs typeface="Calibri" pitchFamily="34" charset="-120"/>
               </a:rPr>
-              <a:t>CadQuery + OCP</a:t>
+              <a:t>OCP (cadquery-ocp)</a:t>
             </a:r>
             <a:endParaRPr lang="en-US" sz="1050" dirty="0"/>
           </a:p>
